--- a/en/slides/22-Computer_Architecture-Verm1_Part_4-Lab.pptx
+++ b/en/slides/22-Computer_Architecture-Verm1_Part_4-Lab.pptx
@@ -150,18 +150,18 @@
   <p:extLst>
     <p:ext uri="{521415D9-36F7-43E2-AB2F-B90AF26B5E84}">
       <p14:sectionLst xmlns:p14="http://schemas.microsoft.com/office/powerpoint/2010/main">
-        <p14:section name="Opening" id="{c9d6d2b4-ae29-550a-902c-27998914a148}">
+        <p14:section name="Opening" id="{c5231ce5-fba4-1c60-5899-d386ee6978ce}">
           <p14:sldIdLst>
             <p14:sldId id="256"/>
             <p14:sldId id="257"/>
           </p14:sldIdLst>
         </p14:section>
-        <p14:section name="The listings" id="{ed08deef-8f33-a683-cf6f-8a9fe56632cb}">
+        <p14:section name="The listings" id="{9eb929a0-3a59-ed37-0acb-fd82148fba85}">
           <p14:sldIdLst>
             <p14:sldId id="258"/>
           </p14:sldIdLst>
         </p14:section>
-        <p14:section name="Step 1: the score in digits" id="{d009a936-7494-adbb-461f-e804cbdc863c}">
+        <p14:section name="Step 1: the score in digits" id="{349d7465-89c7-6fcb-0967-68257c0d7ac4}">
           <p14:sldIdLst>
             <p14:sldId id="259"/>
             <p14:sldId id="260"/>
@@ -169,14 +169,14 @@
             <p14:sldId id="262"/>
           </p14:sldIdLst>
         </p14:section>
-        <p14:section name="Step 2: levels" id="{16e25c8e-eb8f-5ef7-e505-fdb060d80144}">
+        <p14:section name="Step 2: levels" id="{5a9b3840-6436-7fc8-b44f-04711ecdcfa1}">
           <p14:sldIdLst>
             <p14:sldId id="263"/>
             <p14:sldId id="264"/>
             <p14:sldId id="265"/>
           </p14:sldIdLst>
         </p14:section>
-        <p14:section name="Step 3: step tells what it changed" id="{c52a62db-49e4-05d8-48df-4df859701ca6}">
+        <p14:section name="Step 3: step tells what it changed" id="{473595b6-4769-1bc5-a217-339e9a412e49}">
           <p14:sldIdLst>
             <p14:sldId id="266"/>
             <p14:sldId id="267"/>
@@ -188,7 +188,7 @@
             <p14:sldId id="273"/>
           </p14:sldIdLst>
         </p14:section>
-        <p14:section name="Step 4: draw only what changed" id="{4cf50347-7953-681e-5f9c-97dd8bd445f7}">
+        <p14:section name="Step 4: draw only what changed" id="{933653af-d46a-65be-63d5-50e264f20fe6}">
           <p14:sldIdLst>
             <p14:sldId id="274"/>
             <p14:sldId id="275"/>
@@ -203,7 +203,7 @@
             <p14:sldId id="284"/>
           </p14:sldIdLst>
         </p14:section>
-        <p14:section name="Step 5: measure" id="{25cf57ba-9b33-b6db-22e0-82fbb1f7b71d}">
+        <p14:section name="Step 5: measure" id="{56a51615-ae6b-3492-366c-900ce3c503af}">
           <p14:sldIdLst>
             <p14:sldId id="285"/>
             <p14:sldId id="286"/>
@@ -216,7 +216,7 @@
             <p14:sldId id="293"/>
           </p14:sldIdLst>
         </p14:section>
-        <p14:section name="Run it and test it" id="{5e185540-780f-2860-7bae-1a61ba9801ee}">
+        <p14:section name="Run it and test it" id="{55056f3a-0e19-55ba-4397-0f9b2ceb0922}">
           <p14:sldIdLst>
             <p14:sldId id="294"/>
             <p14:sldId id="295"/>
@@ -225,7 +225,7 @@
             <p14:sldId id="298"/>
           </p14:sldIdLst>
         </p14:section>
-        <p14:section name="Exercises" id="{585da317-a8ca-82de-519e-0fd6fdd752f8}">
+        <p14:section name="Exercises" id="{f2516e4b-a667-3282-b1ec-41964fd26a8c}">
           <p14:sldIdLst>
             <p14:sldId id="299"/>
           </p14:sldIdLst>

--- a/en/slides/22-Computer_Architecture-Verm1_Part_4-Lab.pptx
+++ b/en/slides/22-Computer_Architecture-Verm1_Part_4-Lab.pptx
@@ -150,18 +150,18 @@
   <p:extLst>
     <p:ext uri="{521415D9-36F7-43E2-AB2F-B90AF26B5E84}">
       <p14:sectionLst xmlns:p14="http://schemas.microsoft.com/office/powerpoint/2010/main">
-        <p14:section name="Opening" id="{c5231ce5-fba4-1c60-5899-d386ee6978ce}">
+        <p14:section name="Opening" id="{69183c17-dbd1-97d8-94e1-fa108cec635e}">
           <p14:sldIdLst>
             <p14:sldId id="256"/>
             <p14:sldId id="257"/>
           </p14:sldIdLst>
         </p14:section>
-        <p14:section name="The listings" id="{9eb929a0-3a59-ed37-0acb-fd82148fba85}">
+        <p14:section name="The listings" id="{35ac6205-f3a5-6c20-6cb1-d7104b8bbe34}">
           <p14:sldIdLst>
             <p14:sldId id="258"/>
           </p14:sldIdLst>
         </p14:section>
-        <p14:section name="Step 1: the score in digits" id="{349d7465-89c7-6fcb-0967-68257c0d7ac4}">
+        <p14:section name="Step 1: the score in digits" id="{7e4dff15-44b1-9904-278d-59f96f52e2b2}">
           <p14:sldIdLst>
             <p14:sldId id="259"/>
             <p14:sldId id="260"/>
@@ -169,14 +169,14 @@
             <p14:sldId id="262"/>
           </p14:sldIdLst>
         </p14:section>
-        <p14:section name="Step 2: levels" id="{5a9b3840-6436-7fc8-b44f-04711ecdcfa1}">
+        <p14:section name="Step 2: levels" id="{29b73423-889d-6c5c-b50c-dbea359203ff}">
           <p14:sldIdLst>
             <p14:sldId id="263"/>
             <p14:sldId id="264"/>
             <p14:sldId id="265"/>
           </p14:sldIdLst>
         </p14:section>
-        <p14:section name="Step 3: step tells what it changed" id="{473595b6-4769-1bc5-a217-339e9a412e49}">
+        <p14:section name="Step 3: step tells what it changed" id="{04446ca7-8609-72fd-ed43-eb57dc224d85}">
           <p14:sldIdLst>
             <p14:sldId id="266"/>
             <p14:sldId id="267"/>
@@ -188,7 +188,7 @@
             <p14:sldId id="273"/>
           </p14:sldIdLst>
         </p14:section>
-        <p14:section name="Step 4: draw only what changed" id="{933653af-d46a-65be-63d5-50e264f20fe6}">
+        <p14:section name="Step 4: draw only what changed" id="{065d26de-31d4-c183-3cd9-70f8136fb60e}">
           <p14:sldIdLst>
             <p14:sldId id="274"/>
             <p14:sldId id="275"/>
@@ -203,7 +203,7 @@
             <p14:sldId id="284"/>
           </p14:sldIdLst>
         </p14:section>
-        <p14:section name="Step 5: measure" id="{56a51615-ae6b-3492-366c-900ce3c503af}">
+        <p14:section name="Step 5: measure" id="{a2e9f36a-737d-3a39-53fd-b572d7cd4508}">
           <p14:sldIdLst>
             <p14:sldId id="285"/>
             <p14:sldId id="286"/>
@@ -216,7 +216,7 @@
             <p14:sldId id="293"/>
           </p14:sldIdLst>
         </p14:section>
-        <p14:section name="Run it and test it" id="{55056f3a-0e19-55ba-4397-0f9b2ceb0922}">
+        <p14:section name="Run it and test it" id="{2a379276-b45c-450c-86ee-dd6821156f59}">
           <p14:sldIdLst>
             <p14:sldId id="294"/>
             <p14:sldId id="295"/>
@@ -225,7 +225,7 @@
             <p14:sldId id="298"/>
           </p14:sldIdLst>
         </p14:section>
-        <p14:section name="Exercises" id="{f2516e4b-a667-3282-b1ec-41964fd26a8c}">
+        <p14:section name="Exercises" id="{127894be-f452-ffda-7ee1-0d41a2925b11}">
           <p14:sldIdLst>
             <p14:sldId id="299"/>
           </p14:sldIdLst>
@@ -636,7 +636,8 @@
               <a:rPr lang="en-US" dirty="0"/>
               <a:t>This is the code deck of Lecture 22. Where the lecture deck develops the concepts, this deck contains everything that is written and executed: each listing with its commentary, the complete program of the lecture, the output it is expected to produce, and the procedure for testing it on each of the three hosts. The two decks are meant to be read together: the concepts explain the code, and the code gives the concepts an observable consequence.
 Learning status: UNDERSTAND NOW, by the end of this lecture you explain it, trace it and apply it on your own; USE NOW, you follow and use the recipe today; how it works inside is explained later, or is not part of the course; UNDERSTAND LATER, recognise the name and what it is for; a later lecture explains it. A slide without a badge is context: a story, an example, a question, an exercise.
-Learning status of this lecture. UNDERSTAND NOW: quotient and remainder; characters and strings; fixed point; the calling convention; arrays in memory; finite-state machines; the frame buffer; the processor cycle. USE NOW: the PRG32 tools, the PRG32-QT debugger (used, not studied, in this course). UNDERSTAND LATER: nothing. A slide without a badge is context: a story, an example, a question, an exercise.</a:t>
+Learning status of this lecture. UNDERSTAND NOW: quotient and remainder; characters and strings; fixed point; the calling convention; arrays in memory; finite-state machines; the frame buffer; the processor cycle. USE NOW: the PRG32 tools, the PRG32-QT debugger (used, not studied, in this course). UNDERSTAND LATER: nothing. A slide without a badge is context: a story, an example, a question, an exercise.
+Roadmap. Today's outcomes: (1) turn a number into decimal digits with divu and remu; (2) draw only what changed, with a dirty flag; (3) finish the game: levels, sound, speed. Builds on: characters and strings (Lecture 04); fixed point (Lecture 06); the calling convention (Lecture 18); arrays in memory (Lecture 04); finite-state machines (Lecture 13). Next: Lecture 23, Verm1 on the Cartridge Store.</a:t>
             </a:r>
             <a:endParaRPr lang="en-US" dirty="0"/>
           </a:p>
